--- a/classes/parte-3-hacking-etico-y-pentesting-metodologia/084-anti-forense-y-borrado-de-huellas-concepto-y-limites/clase-084-presentacion.pptx
+++ b/classes/parte-3-hacking-etico-y-pentesting-metodologia/084-anti-forense-y-borrado-de-huellas-concepto-y-limites/clase-084-presentacion.pptx
@@ -17,6 +17,9 @@
     <p:sldId id="265" r:id="rId16"/>
     <p:sldId id="266" r:id="rId17"/>
     <p:sldId id="267" r:id="rId18"/>
+    <p:sldId id="268" r:id="rId19"/>
+    <p:sldId id="269" r:id="rId20"/>
+    <p:sldId id="270" r:id="rId21"/>
   </p:sldIdLst>
   <p:sldSz cx="9144000" cy="6858000" type="screen4x3"/>
   <p:notesSz cx="6858000" cy="9144000"/>
@@ -3198,7 +3201,7 @@
                   <a:srgbClr val="0B3D2E"/>
                 </a:solidFill>
               </a:rPr>
-              <a:t>⚠️ Errores comunes</a:t>
+              <a:t>✍️ Ejercicios</a:t>
             </a:r>
           </a:p>
         </p:txBody>
@@ -3236,67 +3239,67 @@
                   <a:srgbClr val="22282E"/>
                 </a:solidFill>
               </a:rPr>
-              <a:t>•  Creer que truncate/wevtutil cl elimina toda la evidencia — Falso: el reenvío central y el journaling conservan copias. Diseña logging centralizado.</a:t>
-            </a:r>
-          </a:p>
-          <a:p>
-            <a:pPr>
-              <a:spcAft>
-                <a:spcPts val="600"/>
-              </a:spcAft>
-            </a:pPr>
-            <a:r>
-              <a:rPr sz="1500">
-                <a:solidFill>
-                  <a:srgbClr val="22282E"/>
-                </a:solidFill>
-              </a:rPr>
-              <a:t>•  No alertar sobre el Event ID 1102 — Es una señal de oro. Añádelo a tu SIEM como detección de alta prioridad.</a:t>
-            </a:r>
-          </a:p>
-          <a:p>
-            <a:pPr>
-              <a:spcAft>
-                <a:spcPts val="600"/>
-              </a:spcAft>
-            </a:pPr>
-            <a:r>
-              <a:rPr sz="1500">
-                <a:solidFill>
-                  <a:srgbClr val="22282E"/>
-                </a:solidFill>
-              </a:rPr>
-              <a:t>•  Pentester que "limpia" logs en un engagement — Viola el contrato y la ley. El consultor documenta y preserva; coordina cualquier limpieza con el cliente.</a:t>
-            </a:r>
-          </a:p>
-          <a:p>
-            <a:pPr>
-              <a:spcAft>
-                <a:spcPts val="600"/>
-              </a:spcAft>
-            </a:pPr>
-            <a:r>
-              <a:rPr sz="1500">
-                <a:solidFill>
-                  <a:srgbClr val="22282E"/>
-                </a:solidFill>
-              </a:rPr>
-              <a:t>•  Confiar solo en logs locales — Manipulables. Reenvía a almacenamiento inmutable (WORM).</a:t>
-            </a:r>
-          </a:p>
-          <a:p>
-            <a:pPr>
-              <a:spcAft>
-                <a:spcPts val="600"/>
-              </a:spcAft>
-            </a:pPr>
-            <a:r>
-              <a:rPr sz="1500">
-                <a:solidFill>
-                  <a:srgbClr val="22282E"/>
-                </a:solidFill>
-              </a:rPr>
-              <a:t>•  Ignorar los gaps de logging — Una ausencia inexplicable de eventos es, en sí, un indicador de compromiso.</a:t>
+              <a:t>•  Explica por qué borrar el Security log de Windows es contraproducente para un atacante sigiloso.</a:t>
+            </a:r>
+          </a:p>
+          <a:p>
+            <a:pPr>
+              <a:spcAft>
+                <a:spcPts val="600"/>
+              </a:spcAft>
+            </a:pPr>
+            <a:r>
+              <a:rPr sz="1500">
+                <a:solidFill>
+                  <a:srgbClr val="22282E"/>
+                </a:solidFill>
+              </a:rPr>
+              <a:t>•  Enumera tres lugares donde la evidencia "borrada" suele sobrevivir (journaling, VSS, memoria, SIEM).</a:t>
+            </a:r>
+          </a:p>
+          <a:p>
+            <a:pPr>
+              <a:spcAft>
+                <a:spcPts val="600"/>
+              </a:spcAft>
+            </a:pPr>
+            <a:r>
+              <a:rPr sz="1500">
+                <a:solidFill>
+                  <a:srgbClr val="22282E"/>
+                </a:solidFill>
+              </a:rPr>
+              <a:t>•  Diseña una alerta que dispare cuando un host deja de enviar logs (silencio anómalo).</a:t>
+            </a:r>
+          </a:p>
+          <a:p>
+            <a:pPr>
+              <a:spcAft>
+                <a:spcPts val="600"/>
+              </a:spcAft>
+            </a:pPr>
+            <a:r>
+              <a:rPr sz="1500">
+                <a:solidFill>
+                  <a:srgbClr val="22282E"/>
+                </a:solidFill>
+              </a:rPr>
+              <a:t>•  Describe cómo detectar timestomping en NTFS.</a:t>
+            </a:r>
+          </a:p>
+          <a:p>
+            <a:pPr>
+              <a:spcAft>
+                <a:spcPts val="600"/>
+              </a:spcAft>
+            </a:pPr>
+            <a:r>
+              <a:rPr sz="1500">
+                <a:solidFill>
+                  <a:srgbClr val="22282E"/>
+                </a:solidFill>
+              </a:rPr>
+              <a:t>•  Argumenta, para un contrato de pentest, por qué el consultor no debe borrar sus huellas y qué cláusula lo regula.</a:t>
             </a:r>
           </a:p>
         </p:txBody>
@@ -3347,7 +3350,7 @@
                   <a:srgbClr val="0B3D2E"/>
                 </a:solidFill>
               </a:rPr>
-              <a:t>❓ Preguntas frecuentes</a:t>
+              <a:t>📝 Reto verificable</a:t>
             </a:r>
           </a:p>
         </p:txBody>
@@ -3385,82 +3388,22 @@
                   <a:srgbClr val="22282E"/>
                 </a:solidFill>
               </a:rPr>
-              <a:t>•  ❓ ¿El anti-forense hace la evidencia irrecuperable?</a:t>
-            </a:r>
-          </a:p>
-          <a:p>
-            <a:pPr>
-              <a:spcAft>
-                <a:spcPts val="600"/>
-              </a:spcAft>
-            </a:pPr>
-            <a:r>
-              <a:rPr sz="1500">
-                <a:solidFill>
-                  <a:srgbClr val="22282E"/>
-                </a:solidFill>
-              </a:rPr>
-              <a:t>•  Casi nunca por completo. Journaling del sistema de archivos, Volume Shadow Copies, memoria RAM y, sobre todo, la telemetría ya enviada al SIEM suelen conservar rastros.</a:t>
-            </a:r>
-          </a:p>
-          <a:p>
-            <a:pPr>
-              <a:spcAft>
-                <a:spcPts val="600"/>
-              </a:spcAft>
-            </a:pPr>
-            <a:r>
-              <a:rPr sz="1500">
-                <a:solidFill>
-                  <a:srgbClr val="22282E"/>
-                </a:solidFill>
-              </a:rPr>
-              <a:t>•  ❓ ¿Un pentester ético borra sus huellas?</a:t>
-            </a:r>
-          </a:p>
-          <a:p>
-            <a:pPr>
-              <a:spcAft>
-                <a:spcPts val="600"/>
-              </a:spcAft>
-            </a:pPr>
-            <a:r>
-              <a:rPr sz="1500">
-                <a:solidFill>
-                  <a:srgbClr val="22282E"/>
-                </a:solidFill>
-              </a:rPr>
-              <a:t>•  No. El engagement exige transparencia y trazabilidad; borrar registros obstruiría la capacidad del cliente de auditar y aprendería nada. Toda acción se registra en el informe.</a:t>
-            </a:r>
-          </a:p>
-          <a:p>
-            <a:pPr>
-              <a:spcAft>
-                <a:spcPts val="600"/>
-              </a:spcAft>
-            </a:pPr>
-            <a:r>
-              <a:rPr sz="1500">
-                <a:solidFill>
-                  <a:srgbClr val="22282E"/>
-                </a:solidFill>
-              </a:rPr>
-              <a:t>•  ❓ ¿Cuál es la mejor defensa contra la manipulación de logs?</a:t>
-            </a:r>
-          </a:p>
-          <a:p>
-            <a:pPr>
-              <a:spcAft>
-                <a:spcPts val="600"/>
-              </a:spcAft>
-            </a:pPr>
-            <a:r>
-              <a:rPr sz="1500">
-                <a:solidFill>
-                  <a:srgbClr val="22282E"/>
-                </a:solidFill>
-              </a:rPr>
-              <a:t>•  Reenvío inmediato a un colector central con almacenamiento inmutable y alertas sobre eventos de limpieza y sobre silencios anómalos.</a:t>
+              <a:t>•  Demuestra que tu arquitectura de logging preserva evidencia pese a un borrado local.</a:t>
+            </a:r>
+          </a:p>
+          <a:p>
+            <a:pPr>
+              <a:spcAft>
+                <a:spcPts val="600"/>
+              </a:spcAft>
+            </a:pPr>
+            <a:r>
+              <a:rPr sz="1500">
+                <a:solidFill>
+                  <a:srgbClr val="22282E"/>
+                </a:solidFill>
+              </a:rPr>
+              <a:t>•  Criterio de aceptación: entregas (a) la config de reenvío, (b) evidencia en el colector de eventos anteriores al truncado local, y (c) una regla/alerta que detecta el Event ID 1102 o el silencio de…</a:t>
             </a:r>
           </a:p>
         </p:txBody>
@@ -3511,7 +3454,7 @@
                   <a:srgbClr val="0B3D2E"/>
                 </a:solidFill>
               </a:rPr>
-              <a:t>🔗 Referencias</a:t>
+              <a:t>⚠️ Errores comunes</a:t>
             </a:r>
           </a:p>
         </p:txBody>
@@ -3549,6 +3492,319 @@
                   <a:srgbClr val="22282E"/>
                 </a:solidFill>
               </a:rPr>
+              <a:t>•  Creer que truncate/wevtutil cl elimina toda la evidencia — Falso: el reenvío central y el journaling conservan copias. Diseña logging centralizado.</a:t>
+            </a:r>
+          </a:p>
+          <a:p>
+            <a:pPr>
+              <a:spcAft>
+                <a:spcPts val="600"/>
+              </a:spcAft>
+            </a:pPr>
+            <a:r>
+              <a:rPr sz="1500">
+                <a:solidFill>
+                  <a:srgbClr val="22282E"/>
+                </a:solidFill>
+              </a:rPr>
+              <a:t>•  No alertar sobre el Event ID 1102 — Es una señal de oro. Añádelo a tu SIEM como detección de alta prioridad.</a:t>
+            </a:r>
+          </a:p>
+          <a:p>
+            <a:pPr>
+              <a:spcAft>
+                <a:spcPts val="600"/>
+              </a:spcAft>
+            </a:pPr>
+            <a:r>
+              <a:rPr sz="1500">
+                <a:solidFill>
+                  <a:srgbClr val="22282E"/>
+                </a:solidFill>
+              </a:rPr>
+              <a:t>•  Pentester que "limpia" logs en un engagement — Viola el contrato y la ley. El consultor documenta y preserva; coordina cualquier limpieza con el cliente.</a:t>
+            </a:r>
+          </a:p>
+          <a:p>
+            <a:pPr>
+              <a:spcAft>
+                <a:spcPts val="600"/>
+              </a:spcAft>
+            </a:pPr>
+            <a:r>
+              <a:rPr sz="1500">
+                <a:solidFill>
+                  <a:srgbClr val="22282E"/>
+                </a:solidFill>
+              </a:rPr>
+              <a:t>•  Confiar solo en logs locales — Manipulables. Reenvía a almacenamiento inmutable (WORM).</a:t>
+            </a:r>
+          </a:p>
+          <a:p>
+            <a:pPr>
+              <a:spcAft>
+                <a:spcPts val="600"/>
+              </a:spcAft>
+            </a:pPr>
+            <a:r>
+              <a:rPr sz="1500">
+                <a:solidFill>
+                  <a:srgbClr val="22282E"/>
+                </a:solidFill>
+              </a:rPr>
+              <a:t>•  Ignorar los gaps de logging — Una ausencia inexplicable de eventos es, en sí, un indicador de compromiso.</a:t>
+            </a:r>
+          </a:p>
+        </p:txBody>
+      </p:sp>
+    </p:spTree>
+  </p:cSld>
+  <p:clrMapOvr>
+    <a:masterClrMapping/>
+  </p:clrMapOvr>
+</p:sld>
+</file>
+
+<file path=ppt/slides/slide13.xml><?xml version="1.0" encoding="utf-8"?>
+<p:sld xmlns:a="http://schemas.openxmlformats.org/drawingml/2006/main" xmlns:p="http://schemas.openxmlformats.org/presentationml/2006/main" xmlns:r="http://schemas.openxmlformats.org/officeDocument/2006/relationships">
+  <p:cSld>
+    <p:spTree>
+      <p:nvGrpSpPr>
+        <p:cNvPr id="1" name=""/>
+        <p:cNvGrpSpPr/>
+        <p:nvPr/>
+      </p:nvGrpSpPr>
+      <p:grpSpPr/>
+      <p:sp>
+        <p:nvSpPr>
+          <p:cNvPr id="2" name="TextBox 1"/>
+          <p:cNvSpPr txBox="1"/>
+          <p:nvPr/>
+        </p:nvSpPr>
+        <p:spPr>
+          <a:xfrm>
+            <a:off x="457200" y="320040"/>
+            <a:ext cx="8229600" cy="822960"/>
+          </a:xfrm>
+          <a:prstGeom prst="rect">
+            <a:avLst/>
+          </a:prstGeom>
+          <a:noFill/>
+        </p:spPr>
+        <p:txBody>
+          <a:bodyPr wrap="square">
+            <a:spAutoFit/>
+          </a:bodyPr>
+          <a:lstStyle/>
+          <a:p>
+            <a:r>
+              <a:rPr sz="2600" b="1">
+                <a:solidFill>
+                  <a:srgbClr val="0B3D2E"/>
+                </a:solidFill>
+              </a:rPr>
+              <a:t>❓ Preguntas frecuentes</a:t>
+            </a:r>
+          </a:p>
+        </p:txBody>
+      </p:sp>
+      <p:sp>
+        <p:nvSpPr>
+          <p:cNvPr id="3" name="TextBox 2"/>
+          <p:cNvSpPr txBox="1"/>
+          <p:nvPr/>
+        </p:nvSpPr>
+        <p:spPr>
+          <a:xfrm>
+            <a:off x="457200" y="1280160"/>
+            <a:ext cx="8229600" cy="4937760"/>
+          </a:xfrm>
+          <a:prstGeom prst="rect">
+            <a:avLst/>
+          </a:prstGeom>
+          <a:noFill/>
+        </p:spPr>
+        <p:txBody>
+          <a:bodyPr wrap="square">
+            <a:spAutoFit/>
+          </a:bodyPr>
+          <a:lstStyle/>
+          <a:p>
+            <a:pPr>
+              <a:spcAft>
+                <a:spcPts val="600"/>
+              </a:spcAft>
+            </a:pPr>
+            <a:r>
+              <a:rPr sz="1500">
+                <a:solidFill>
+                  <a:srgbClr val="22282E"/>
+                </a:solidFill>
+              </a:rPr>
+              <a:t>•  ❓ ¿El anti-forense hace la evidencia irrecuperable?</a:t>
+            </a:r>
+          </a:p>
+          <a:p>
+            <a:pPr>
+              <a:spcAft>
+                <a:spcPts val="600"/>
+              </a:spcAft>
+            </a:pPr>
+            <a:r>
+              <a:rPr sz="1500">
+                <a:solidFill>
+                  <a:srgbClr val="22282E"/>
+                </a:solidFill>
+              </a:rPr>
+              <a:t>•  Casi nunca por completo. Journaling del sistema de archivos, Volume Shadow Copies, memoria RAM y, sobre todo, la telemetría ya enviada al SIEM suelen conservar rastros.</a:t>
+            </a:r>
+          </a:p>
+          <a:p>
+            <a:pPr>
+              <a:spcAft>
+                <a:spcPts val="600"/>
+              </a:spcAft>
+            </a:pPr>
+            <a:r>
+              <a:rPr sz="1500">
+                <a:solidFill>
+                  <a:srgbClr val="22282E"/>
+                </a:solidFill>
+              </a:rPr>
+              <a:t>•  ❓ ¿Un pentester ético borra sus huellas?</a:t>
+            </a:r>
+          </a:p>
+          <a:p>
+            <a:pPr>
+              <a:spcAft>
+                <a:spcPts val="600"/>
+              </a:spcAft>
+            </a:pPr>
+            <a:r>
+              <a:rPr sz="1500">
+                <a:solidFill>
+                  <a:srgbClr val="22282E"/>
+                </a:solidFill>
+              </a:rPr>
+              <a:t>•  No. El engagement exige transparencia y trazabilidad; borrar registros obstruiría la capacidad del cliente de auditar y aprendería nada. Toda acción se registra en el informe.</a:t>
+            </a:r>
+          </a:p>
+          <a:p>
+            <a:pPr>
+              <a:spcAft>
+                <a:spcPts val="600"/>
+              </a:spcAft>
+            </a:pPr>
+            <a:r>
+              <a:rPr sz="1500">
+                <a:solidFill>
+                  <a:srgbClr val="22282E"/>
+                </a:solidFill>
+              </a:rPr>
+              <a:t>•  ❓ ¿Cuál es la mejor defensa contra la manipulación de logs?</a:t>
+            </a:r>
+          </a:p>
+          <a:p>
+            <a:pPr>
+              <a:spcAft>
+                <a:spcPts val="600"/>
+              </a:spcAft>
+            </a:pPr>
+            <a:r>
+              <a:rPr sz="1500">
+                <a:solidFill>
+                  <a:srgbClr val="22282E"/>
+                </a:solidFill>
+              </a:rPr>
+              <a:t>•  Reenvío inmediato a un colector central con almacenamiento inmutable y alertas sobre eventos de limpieza y sobre silencios anómalos.</a:t>
+            </a:r>
+          </a:p>
+        </p:txBody>
+      </p:sp>
+    </p:spTree>
+  </p:cSld>
+  <p:clrMapOvr>
+    <a:masterClrMapping/>
+  </p:clrMapOvr>
+</p:sld>
+</file>
+
+<file path=ppt/slides/slide14.xml><?xml version="1.0" encoding="utf-8"?>
+<p:sld xmlns:a="http://schemas.openxmlformats.org/drawingml/2006/main" xmlns:p="http://schemas.openxmlformats.org/presentationml/2006/main" xmlns:r="http://schemas.openxmlformats.org/officeDocument/2006/relationships">
+  <p:cSld>
+    <p:spTree>
+      <p:nvGrpSpPr>
+        <p:cNvPr id="1" name=""/>
+        <p:cNvGrpSpPr/>
+        <p:nvPr/>
+      </p:nvGrpSpPr>
+      <p:grpSpPr/>
+      <p:sp>
+        <p:nvSpPr>
+          <p:cNvPr id="2" name="TextBox 1"/>
+          <p:cNvSpPr txBox="1"/>
+          <p:nvPr/>
+        </p:nvSpPr>
+        <p:spPr>
+          <a:xfrm>
+            <a:off x="457200" y="320040"/>
+            <a:ext cx="8229600" cy="822960"/>
+          </a:xfrm>
+          <a:prstGeom prst="rect">
+            <a:avLst/>
+          </a:prstGeom>
+          <a:noFill/>
+        </p:spPr>
+        <p:txBody>
+          <a:bodyPr wrap="square">
+            <a:spAutoFit/>
+          </a:bodyPr>
+          <a:lstStyle/>
+          <a:p>
+            <a:r>
+              <a:rPr sz="2600" b="1">
+                <a:solidFill>
+                  <a:srgbClr val="0B3D2E"/>
+                </a:solidFill>
+              </a:rPr>
+              <a:t>🔗 Referencias</a:t>
+            </a:r>
+          </a:p>
+        </p:txBody>
+      </p:sp>
+      <p:sp>
+        <p:nvSpPr>
+          <p:cNvPr id="3" name="TextBox 2"/>
+          <p:cNvSpPr txBox="1"/>
+          <p:nvPr/>
+        </p:nvSpPr>
+        <p:spPr>
+          <a:xfrm>
+            <a:off x="457200" y="1280160"/>
+            <a:ext cx="8229600" cy="4937760"/>
+          </a:xfrm>
+          <a:prstGeom prst="rect">
+            <a:avLst/>
+          </a:prstGeom>
+          <a:noFill/>
+        </p:spPr>
+        <p:txBody>
+          <a:bodyPr wrap="square">
+            <a:spAutoFit/>
+          </a:bodyPr>
+          <a:lstStyle/>
+          <a:p>
+            <a:pPr>
+              <a:spcAft>
+                <a:spcPts val="600"/>
+              </a:spcAft>
+            </a:pPr>
+            <a:r>
+              <a:rPr sz="1500">
+                <a:solidFill>
+                  <a:srgbClr val="22282E"/>
+                </a:solidFill>
+              </a:rPr>
               <a:t>•  MITRE ATT&amp;CK — Indicator Removal (T1070) · Defense Evasion (TA0005)</a:t>
             </a:r>
           </a:p>
@@ -3599,6 +3855,81 @@
           </a:p>
         </p:txBody>
       </p:sp>
+    </p:spTree>
+  </p:cSld>
+  <p:clrMapOvr>
+    <a:masterClrMapping/>
+  </p:clrMapOvr>
+</p:sld>
+</file>
+
+<file path=ppt/slides/slide15.xml><?xml version="1.0" encoding="utf-8"?>
+<p:sld xmlns:a="http://schemas.openxmlformats.org/drawingml/2006/main" xmlns:p="http://schemas.openxmlformats.org/presentationml/2006/main" xmlns:r="http://schemas.openxmlformats.org/officeDocument/2006/relationships">
+  <p:cSld>
+    <p:spTree>
+      <p:nvGrpSpPr>
+        <p:cNvPr id="1" name=""/>
+        <p:cNvGrpSpPr/>
+        <p:nvPr/>
+      </p:nvGrpSpPr>
+      <p:grpSpPr/>
+      <p:sp>
+        <p:nvSpPr>
+          <p:cNvPr id="2" name="TextBox 1"/>
+          <p:cNvSpPr txBox="1"/>
+          <p:nvPr/>
+        </p:nvSpPr>
+        <p:spPr>
+          <a:xfrm>
+            <a:off x="457200" y="274320"/>
+            <a:ext cx="8229600" cy="640080"/>
+          </a:xfrm>
+          <a:prstGeom prst="rect">
+            <a:avLst/>
+          </a:prstGeom>
+          <a:noFill/>
+        </p:spPr>
+        <p:txBody>
+          <a:bodyPr wrap="square">
+            <a:spAutoFit/>
+          </a:bodyPr>
+          <a:lstStyle/>
+          <a:p>
+            <a:r>
+              <a:rPr sz="2200" b="1">
+                <a:solidFill>
+                  <a:srgbClr val="0B3D2E"/>
+                </a:solidFill>
+              </a:rPr>
+              <a:t>Diagrama de la clase</a:t>
+            </a:r>
+          </a:p>
+        </p:txBody>
+      </p:sp>
+      <p:pic>
+        <p:nvPicPr>
+          <p:cNvPr id="3" name="Picture 2" descr="72c0a627f841d8e9.png"/>
+          <p:cNvPicPr>
+            <a:picLocks noChangeAspect="1"/>
+          </p:cNvPicPr>
+          <p:nvPr/>
+        </p:nvPicPr>
+        <p:blipFill>
+          <a:blip r:embed="rId2"/>
+          <a:stretch>
+            <a:fillRect/>
+          </a:stretch>
+        </p:blipFill>
+        <p:spPr>
+          <a:xfrm>
+            <a:off x="457200" y="1097800"/>
+            <a:ext cx="8229600" cy="5302480"/>
+          </a:xfrm>
+          <a:prstGeom prst="rect">
+            <a:avLst/>
+          </a:prstGeom>
+        </p:spPr>
+      </p:pic>
     </p:spTree>
   </p:cSld>
   <p:clrMapOvr>
@@ -3683,7 +4014,7 @@
                   <a:srgbClr val="22282E"/>
                 </a:solidFill>
               </a:rPr>
-              <a:t>•  Entender las técnicas anti-forense (borrado de logs, timestomping, cifrado, wiping, ocultación) desde el punto de vista del defensor: reconocer sus indicios, comprender sus límites (qué casi nunca se puede borrar del todo) y usar ese conocimiento para diseñar telemetría resistente a manipulación. El mensaje central: en un engagement legítimo, la transparencia es un requisito contractual, no una debilidad.</a:t>
+              <a:t>•  Entender las técnicas anti-forense (borrado de logs, timestomping, cifrado, wiping, ocultación) desde el punto de vista del defensor: reconocer sus indicios, comprender sus límites (qué casi nunca se…</a:t>
             </a:r>
           </a:p>
         </p:txBody>
@@ -4062,7 +4393,7 @@
                   <a:srgbClr val="0B3D2E"/>
                 </a:solidFill>
               </a:rPr>
-              <a:t>📖 Definiciones y características</a:t>
+              <a:t>🧠 Explicación en profundidad</a:t>
             </a:r>
           </a:p>
         </p:txBody>
@@ -4100,97 +4431,97 @@
                   <a:srgbClr val="22282E"/>
                 </a:solidFill>
               </a:rPr>
-              <a:t>•  Anti-forense</a:t>
-            </a:r>
-          </a:p>
-          <a:p>
-            <a:pPr>
-              <a:spcAft>
-                <a:spcPts val="600"/>
-              </a:spcAft>
-            </a:pPr>
-            <a:r>
-              <a:rPr sz="1500">
-                <a:solidFill>
-                  <a:srgbClr val="22282E"/>
-                </a:solidFill>
-              </a:rPr>
-              <a:t>•  Conjunto de técnicas orientadas a dificultar el análisis forense. Característica clave para el defensor: casi todas dejan su propio rastro (una ausencia sospechosa es, en sí, un indicador).</a:t>
-            </a:r>
-          </a:p>
-          <a:p>
-            <a:pPr>
-              <a:spcAft>
-                <a:spcPts val="600"/>
-              </a:spcAft>
-            </a:pPr>
-            <a:r>
-              <a:rPr sz="1500">
-                <a:solidFill>
-                  <a:srgbClr val="22282E"/>
-                </a:solidFill>
-              </a:rPr>
-              <a:t>•  Indicator Removal (T1070)</a:t>
-            </a:r>
-          </a:p>
-          <a:p>
-            <a:pPr>
-              <a:spcAft>
-                <a:spcPts val="600"/>
-              </a:spcAft>
-            </a:pPr>
-            <a:r>
-              <a:rPr sz="1500">
-                <a:solidFill>
-                  <a:srgbClr val="22282E"/>
-                </a:solidFill>
-              </a:rPr>
-              <a:t>•  Técnica ATT&amp;CK de eliminación de artefactos (logs, historiales, archivos). En Windows, borrar el Security Event Log genera el propio Event ID 1102 ("audit log cleared").</a:t>
-            </a:r>
-          </a:p>
-          <a:p>
-            <a:pPr>
-              <a:spcAft>
-                <a:spcPts val="600"/>
-              </a:spcAft>
-            </a:pPr>
-            <a:r>
-              <a:rPr sz="1500">
-                <a:solidFill>
-                  <a:srgbClr val="22282E"/>
-                </a:solidFill>
-              </a:rPr>
-              <a:t>•  Timestomping</a:t>
-            </a:r>
-          </a:p>
-          <a:p>
-            <a:pPr>
-              <a:spcAft>
-                <a:spcPts val="600"/>
-              </a:spcAft>
-            </a:pPr>
-            <a:r>
-              <a:rPr sz="1500">
-                <a:solidFill>
-                  <a:srgbClr val="22282E"/>
-                </a:solidFill>
-              </a:rPr>
-              <a:t>•  Modificación de las marcas de tiempo (MACE) de un archivo para despistar. Se detecta comparando los timestamps de $STANDARDINFORMATION con $FILENAME en NTFS, que suelen divergir tras la manipulación.</a:t>
-            </a:r>
-          </a:p>
-          <a:p>
-            <a:pPr>
-              <a:spcAft>
-                <a:spcPts val="600"/>
-              </a:spcAft>
-            </a:pPr>
-            <a:r>
-              <a:rPr sz="1500">
-                <a:solidFill>
-                  <a:srgbClr val="22282E"/>
-                </a:solidFill>
-              </a:rPr>
-              <a:t>•  Log forwarding (reenvío de logs)</a:t>
+              <a:t>•  El anti-forense agrupa las técnicas para borrar o falsear las huellas de una intrusión.</a:t>
+            </a:r>
+          </a:p>
+          <a:p>
+            <a:pPr>
+              <a:spcAft>
+                <a:spcPts val="600"/>
+              </a:spcAft>
+            </a:pPr>
+            <a:r>
+              <a:rPr sz="1500">
+                <a:solidFill>
+                  <a:srgbClr val="22282E"/>
+                </a:solidFill>
+              </a:rPr>
+              <a:t>•  Se estudia en un curso de seguridad defensiva por una razón precisa: entender cómo se</a:t>
+            </a:r>
+          </a:p>
+          <a:p>
+            <a:pPr>
+              <a:spcAft>
+                <a:spcPts val="600"/>
+              </a:spcAft>
+            </a:pPr>
+            <a:r>
+              <a:rPr sz="1500">
+                <a:solidFill>
+                  <a:srgbClr val="22282E"/>
+                </a:solidFill>
+              </a:rPr>
+              <a:t>•  intenta borrar el rastro es lo que enseña a diseñar telemetría que no se pueda borrar. La</a:t>
+            </a:r>
+          </a:p>
+          <a:p>
+            <a:pPr>
+              <a:spcAft>
+                <a:spcPts val="600"/>
+              </a:spcAft>
+            </a:pPr>
+            <a:r>
+              <a:rPr sz="1500">
+                <a:solidFill>
+                  <a:srgbClr val="22282E"/>
+                </a:solidFill>
+              </a:rPr>
+              <a:t>•  clase se aborda desde esa óptica —conocer el ataque para construir la defensa— y con una tesis</a:t>
+            </a:r>
+          </a:p>
+          <a:p>
+            <a:pPr>
+              <a:spcAft>
+                <a:spcPts val="600"/>
+              </a:spcAft>
+            </a:pPr>
+            <a:r>
+              <a:rPr sz="1500">
+                <a:solidFill>
+                  <a:srgbClr val="22282E"/>
+                </a:solidFill>
+              </a:rPr>
+              <a:t>•  que la recorre entera: el borrado casi nunca es completo, y el propio intento de borrar es un</a:t>
+            </a:r>
+          </a:p>
+          <a:p>
+            <a:pPr>
+              <a:spcAft>
+                <a:spcPts val="600"/>
+              </a:spcAft>
+            </a:pPr>
+            <a:r>
+              <a:rPr sz="1500">
+                <a:solidFill>
+                  <a:srgbClr val="22282E"/>
+                </a:solidFill>
+              </a:rPr>
+              <a:t>•  evento detectable.</a:t>
+            </a:r>
+          </a:p>
+          <a:p>
+            <a:pPr>
+              <a:spcAft>
+                <a:spcPts val="600"/>
+              </a:spcAft>
+            </a:pPr>
+            <a:r>
+              <a:rPr sz="1500">
+                <a:solidFill>
+                  <a:srgbClr val="22282E"/>
+                </a:solidFill>
+              </a:rPr>
+              <a:t>•  MITRE ATT&amp;CK cataloga esto bajo Defense Evasion, y da un mapa mental útil de las categorías:</a:t>
             </a:r>
           </a:p>
         </p:txBody>
@@ -4241,7 +4572,7 @@
                   <a:srgbClr val="0B3D2E"/>
                 </a:solidFill>
               </a:rPr>
-              <a:t>🧰 Herramientas y preparación</a:t>
+              <a:t>📖 Definiciones y características</a:t>
             </a:r>
           </a:p>
         </p:txBody>
@@ -4279,7 +4610,97 @@
                   <a:srgbClr val="22282E"/>
                 </a:solidFill>
               </a:rPr>
-              <a:t>•  Enfoque de análisis, en tu laboratorio: un colector de logs (rsyslog/Wazuh/Elastic) recibiendo eventos de una VM propia, y herramientas forenses de lectura (Autopsy, análisis de $MFT, Get-WinEvent). No se practican técnicas destructivas; se observa cómo un colector central preserva la evidencia que un borrado local intentaría eliminar.</a:t>
+              <a:t>•  Anti-forense</a:t>
+            </a:r>
+          </a:p>
+          <a:p>
+            <a:pPr>
+              <a:spcAft>
+                <a:spcPts val="600"/>
+              </a:spcAft>
+            </a:pPr>
+            <a:r>
+              <a:rPr sz="1500">
+                <a:solidFill>
+                  <a:srgbClr val="22282E"/>
+                </a:solidFill>
+              </a:rPr>
+              <a:t>•  Conjunto de técnicas orientadas a dificultar el análisis forense. Característica clave para el defensor: casi todas dejan su propio rastro (una ausencia sospechosa es, en sí, un indicador).</a:t>
+            </a:r>
+          </a:p>
+          <a:p>
+            <a:pPr>
+              <a:spcAft>
+                <a:spcPts val="600"/>
+              </a:spcAft>
+            </a:pPr>
+            <a:r>
+              <a:rPr sz="1500">
+                <a:solidFill>
+                  <a:srgbClr val="22282E"/>
+                </a:solidFill>
+              </a:rPr>
+              <a:t>•  Indicator Removal (T1070)</a:t>
+            </a:r>
+          </a:p>
+          <a:p>
+            <a:pPr>
+              <a:spcAft>
+                <a:spcPts val="600"/>
+              </a:spcAft>
+            </a:pPr>
+            <a:r>
+              <a:rPr sz="1500">
+                <a:solidFill>
+                  <a:srgbClr val="22282E"/>
+                </a:solidFill>
+              </a:rPr>
+              <a:t>•  Técnica ATT&amp;CK de eliminación de artefactos (logs, historiales, archivos). En Windows, borrar el Security Event Log genera el propio Event ID 1102 ("audit log cleared").</a:t>
+            </a:r>
+          </a:p>
+          <a:p>
+            <a:pPr>
+              <a:spcAft>
+                <a:spcPts val="600"/>
+              </a:spcAft>
+            </a:pPr>
+            <a:r>
+              <a:rPr sz="1500">
+                <a:solidFill>
+                  <a:srgbClr val="22282E"/>
+                </a:solidFill>
+              </a:rPr>
+              <a:t>•  Timestomping</a:t>
+            </a:r>
+          </a:p>
+          <a:p>
+            <a:pPr>
+              <a:spcAft>
+                <a:spcPts val="600"/>
+              </a:spcAft>
+            </a:pPr>
+            <a:r>
+              <a:rPr sz="1500">
+                <a:solidFill>
+                  <a:srgbClr val="22282E"/>
+                </a:solidFill>
+              </a:rPr>
+              <a:t>•  Modificación de las marcas de tiempo (MACE) de un archivo para despistar. Se detecta comparando los timestamps de $STANDARDINFORMATION con $FILENAME en NTFS, que suelen divergir tras la manipulación.</a:t>
+            </a:r>
+          </a:p>
+          <a:p>
+            <a:pPr>
+              <a:spcAft>
+                <a:spcPts val="600"/>
+              </a:spcAft>
+            </a:pPr>
+            <a:r>
+              <a:rPr sz="1500">
+                <a:solidFill>
+                  <a:srgbClr val="22282E"/>
+                </a:solidFill>
+              </a:rPr>
+              <a:t>•  Log forwarding (reenvío de logs)</a:t>
             </a:r>
           </a:p>
         </p:txBody>
@@ -4330,7 +4751,7 @@
                   <a:srgbClr val="0B3D2E"/>
                 </a:solidFill>
               </a:rPr>
-              <a:t>🧪 Laboratorio guiado (defensivo)</a:t>
+              <a:t>📔 Glosario</a:t>
             </a:r>
           </a:p>
         </p:txBody>
@@ -4368,97 +4789,97 @@
                   <a:srgbClr val="22282E"/>
                 </a:solidFill>
               </a:rPr>
-              <a:t>•  Montar reenvío de logs. Configura una VM Linux propia para enviar sus logs en tiempo real a un colector central (otra VM tuya):</a:t>
-            </a:r>
-          </a:p>
-          <a:p>
-            <a:pPr>
-              <a:spcAft>
-                <a:spcPts val="600"/>
-              </a:spcAft>
-            </a:pPr>
-            <a:r>
-              <a:rPr sz="1500">
-                <a:solidFill>
-                  <a:srgbClr val="22282E"/>
-                </a:solidFill>
-              </a:rPr>
-              <a:t>•  .  @@&lt;IPcolector&gt;:514      # TCP a tu colector de laboratorio</a:t>
-            </a:r>
-          </a:p>
-          <a:p>
-            <a:pPr>
-              <a:spcAft>
-                <a:spcPts val="600"/>
-              </a:spcAft>
-            </a:pPr>
-            <a:r>
-              <a:rPr sz="1500">
-                <a:solidFill>
-                  <a:srgbClr val="22282E"/>
-                </a:solidFill>
-              </a:rPr>
-              <a:t>•  Generar actividad. Realiza acciones normales (login, sudo) para poblar /var/log/auth.log y confirma que llegan al colector.</a:t>
-            </a:r>
-          </a:p>
-          <a:p>
-            <a:pPr>
-              <a:spcAft>
-                <a:spcPts val="600"/>
-              </a:spcAft>
-            </a:pPr>
-            <a:r>
-              <a:rPr sz="1500">
-                <a:solidFill>
-                  <a:srgbClr val="22282E"/>
-                </a:solidFill>
-              </a:rPr>
-              <a:t>•  Simular el borrado local. En la VM origen (tuya), trunca el log local para ver el efecto:</a:t>
-            </a:r>
-          </a:p>
-          <a:p>
-            <a:pPr>
-              <a:spcAft>
-                <a:spcPts val="600"/>
-              </a:spcAft>
-            </a:pPr>
-            <a:r>
-              <a:rPr sz="1500">
-                <a:solidFill>
-                  <a:srgbClr val="22282E"/>
-                </a:solidFill>
-              </a:rPr>
-              <a:t>•  sudo truncate -s 0 /var/log/auth.log    # solo en tu VM de estudio</a:t>
-            </a:r>
-          </a:p>
-          <a:p>
-            <a:pPr>
-              <a:spcAft>
-                <a:spcPts val="600"/>
-              </a:spcAft>
-            </a:pPr>
-            <a:r>
-              <a:rPr sz="1500">
-                <a:solidFill>
-                  <a:srgbClr val="22282E"/>
-                </a:solidFill>
-              </a:rPr>
-              <a:t>•  Verificar la resiliencia. Comprueba en el colector que los eventos previos siguen presentes: el borrado local no los alcanzó. Ese es el control que quieres en producción.</a:t>
-            </a:r>
-          </a:p>
-          <a:p>
-            <a:pPr>
-              <a:spcAft>
-                <a:spcPts val="600"/>
-              </a:spcAft>
-            </a:pPr>
-            <a:r>
-              <a:rPr sz="1500">
-                <a:solidFill>
-                  <a:srgbClr val="22282E"/>
-                </a:solidFill>
-              </a:rPr>
-              <a:t>•  Detección en Windows. En una VM Windows propia, revisa cómo el propio acto de limpiar el log deja rastro:</a:t>
+              <a:t>•  Término — Definición concisa</a:t>
+            </a:r>
+          </a:p>
+          <a:p>
+            <a:pPr>
+              <a:spcAft>
+                <a:spcPts val="600"/>
+              </a:spcAft>
+            </a:pPr>
+            <a:r>
+              <a:rPr sz="1500">
+                <a:solidFill>
+                  <a:srgbClr val="22282E"/>
+                </a:solidFill>
+              </a:rPr>
+              <a:t>•  Anti-forense — Técnicas para borrar o falsear las huellas de una intrusión</a:t>
+            </a:r>
+          </a:p>
+          <a:p>
+            <a:pPr>
+              <a:spcAft>
+                <a:spcPts val="600"/>
+              </a:spcAft>
+            </a:pPr>
+            <a:r>
+              <a:rPr sz="1500">
+                <a:solidFill>
+                  <a:srgbClr val="22282E"/>
+                </a:solidFill>
+              </a:rPr>
+              <a:t>•  MITRE ATT&amp;CK Defense Evasion — Táctica que cataloga estas técnicas</a:t>
+            </a:r>
+          </a:p>
+          <a:p>
+            <a:pPr>
+              <a:spcAft>
+                <a:spcPts val="600"/>
+              </a:spcAft>
+            </a:pPr>
+            <a:r>
+              <a:rPr sz="1500">
+                <a:solidFill>
+                  <a:srgbClr val="22282E"/>
+                </a:solidFill>
+              </a:rPr>
+              <a:t>•  Borrado de logs (T1070) — Eliminar registros; deja un hueco detectable</a:t>
+            </a:r>
+          </a:p>
+          <a:p>
+            <a:pPr>
+              <a:spcAft>
+                <a:spcPts val="600"/>
+              </a:spcAft>
+            </a:pPr>
+            <a:r>
+              <a:rPr sz="1500">
+                <a:solidFill>
+                  <a:srgbClr val="22282E"/>
+                </a:solidFill>
+              </a:rPr>
+              <a:t>•  Timestomping — Falsear las marcas de tiempo de un fichero</a:t>
+            </a:r>
+          </a:p>
+          <a:p>
+            <a:pPr>
+              <a:spcAft>
+                <a:spcPts val="600"/>
+              </a:spcAft>
+            </a:pPr>
+            <a:r>
+              <a:rPr sz="1500">
+                <a:solidFill>
+                  <a:srgbClr val="22282E"/>
+                </a:solidFill>
+              </a:rPr>
+              <a:t>•  MFT — Tabla maestra de ficheros de NTFS; guarda varios timestamps</a:t>
+            </a:r>
+          </a:p>
+          <a:p>
+            <a:pPr>
+              <a:spcAft>
+                <a:spcPts val="600"/>
+              </a:spcAft>
+            </a:pPr>
+            <a:r>
+              <a:rPr sz="1500">
+                <a:solidFill>
+                  <a:srgbClr val="22282E"/>
+                </a:solidFill>
+              </a:rPr>
+              <a:t>•  $STANDARDINFORMATION / $FILENAME — Atributos NTFS cuya incoherencia delata manipulación</a:t>
             </a:r>
           </a:p>
         </p:txBody>
@@ -4509,7 +4930,7 @@
                   <a:srgbClr val="0B3D2E"/>
                 </a:solidFill>
               </a:rPr>
-              <a:t>✍️ Ejercicios</a:t>
+              <a:t>🧰 Herramientas y preparación</a:t>
             </a:r>
           </a:p>
         </p:txBody>
@@ -4547,67 +4968,7 @@
                   <a:srgbClr val="22282E"/>
                 </a:solidFill>
               </a:rPr>
-              <a:t>•  Explica por qué borrar el Security log de Windows es contraproducente para un atacante sigiloso.</a:t>
-            </a:r>
-          </a:p>
-          <a:p>
-            <a:pPr>
-              <a:spcAft>
-                <a:spcPts val="600"/>
-              </a:spcAft>
-            </a:pPr>
-            <a:r>
-              <a:rPr sz="1500">
-                <a:solidFill>
-                  <a:srgbClr val="22282E"/>
-                </a:solidFill>
-              </a:rPr>
-              <a:t>•  Enumera tres lugares donde la evidencia "borrada" suele sobrevivir (journaling, VSS, memoria, SIEM).</a:t>
-            </a:r>
-          </a:p>
-          <a:p>
-            <a:pPr>
-              <a:spcAft>
-                <a:spcPts val="600"/>
-              </a:spcAft>
-            </a:pPr>
-            <a:r>
-              <a:rPr sz="1500">
-                <a:solidFill>
-                  <a:srgbClr val="22282E"/>
-                </a:solidFill>
-              </a:rPr>
-              <a:t>•  Diseña una alerta que dispare cuando un host deja de enviar logs (silencio anómalo).</a:t>
-            </a:r>
-          </a:p>
-          <a:p>
-            <a:pPr>
-              <a:spcAft>
-                <a:spcPts val="600"/>
-              </a:spcAft>
-            </a:pPr>
-            <a:r>
-              <a:rPr sz="1500">
-                <a:solidFill>
-                  <a:srgbClr val="22282E"/>
-                </a:solidFill>
-              </a:rPr>
-              <a:t>•  Describe cómo detectar timestomping en NTFS.</a:t>
-            </a:r>
-          </a:p>
-          <a:p>
-            <a:pPr>
-              <a:spcAft>
-                <a:spcPts val="600"/>
-              </a:spcAft>
-            </a:pPr>
-            <a:r>
-              <a:rPr sz="1500">
-                <a:solidFill>
-                  <a:srgbClr val="22282E"/>
-                </a:solidFill>
-              </a:rPr>
-              <a:t>•  Argumenta, para un contrato de pentest, por qué el consultor no debe borrar sus huellas y qué cláusula lo regula.</a:t>
+              <a:t>•  Enfoque de análisis, en tu laboratorio: un colector de logs (rsyslog/Wazuh/Elastic) recibiendo eventos de una VM propia, y herramientas forenses de lectura (Autopsy, análisis de $MFT, Get-WinEvent).…</a:t>
             </a:r>
           </a:p>
         </p:txBody>
@@ -4658,7 +5019,7 @@
                   <a:srgbClr val="0B3D2E"/>
                 </a:solidFill>
               </a:rPr>
-              <a:t>📝 Reto verificable</a:t>
+              <a:t>🧪 Laboratorio guiado (defensivo)</a:t>
             </a:r>
           </a:p>
         </p:txBody>
@@ -4696,22 +5057,97 @@
                   <a:srgbClr val="22282E"/>
                 </a:solidFill>
               </a:rPr>
-              <a:t>•  Demuestra que tu arquitectura de logging preserva evidencia pese a un borrado local.</a:t>
-            </a:r>
-          </a:p>
-          <a:p>
-            <a:pPr>
-              <a:spcAft>
-                <a:spcPts val="600"/>
-              </a:spcAft>
-            </a:pPr>
-            <a:r>
-              <a:rPr sz="1500">
-                <a:solidFill>
-                  <a:srgbClr val="22282E"/>
-                </a:solidFill>
-              </a:rPr>
-              <a:t>•  Criterio de aceptación: entregas (a) la config de reenvío, (b) evidencia en el colector de eventos anteriores al truncado local, y (c) una regla/alerta que detecta el Event ID 1102 o el silencio de un host. Sin ejecutar técnicas destructivas fuera de tu VM.</a:t>
+              <a:t>•  Montar reenvío de logs. Configura una VM Linux propia para enviar sus logs en tiempo real a un colector central (otra VM tuya):</a:t>
+            </a:r>
+          </a:p>
+          <a:p>
+            <a:pPr>
+              <a:spcAft>
+                <a:spcPts val="600"/>
+              </a:spcAft>
+            </a:pPr>
+            <a:r>
+              <a:rPr sz="1500">
+                <a:solidFill>
+                  <a:srgbClr val="22282E"/>
+                </a:solidFill>
+              </a:rPr>
+              <a:t>•  Generar actividad. Realiza acciones normales (login, sudo) para poblar /var/log/auth.log y confirma que llegan al colector.</a:t>
+            </a:r>
+          </a:p>
+          <a:p>
+            <a:pPr>
+              <a:spcAft>
+                <a:spcPts val="600"/>
+              </a:spcAft>
+            </a:pPr>
+            <a:r>
+              <a:rPr sz="1500">
+                <a:solidFill>
+                  <a:srgbClr val="22282E"/>
+                </a:solidFill>
+              </a:rPr>
+              <a:t>•  Simular el borrado local. En la VM origen (tuya), trunca el log local para ver el efecto:</a:t>
+            </a:r>
+          </a:p>
+          <a:p>
+            <a:pPr>
+              <a:spcAft>
+                <a:spcPts val="600"/>
+              </a:spcAft>
+            </a:pPr>
+            <a:r>
+              <a:rPr sz="1500">
+                <a:solidFill>
+                  <a:srgbClr val="22282E"/>
+                </a:solidFill>
+              </a:rPr>
+              <a:t>•  Verificar la resiliencia. Comprueba en el colector que los eventos previos siguen presentes: el borrado local no los alcanzó. Ese es el control que quieres en producción.</a:t>
+            </a:r>
+          </a:p>
+          <a:p>
+            <a:pPr>
+              <a:spcAft>
+                <a:spcPts val="600"/>
+              </a:spcAft>
+            </a:pPr>
+            <a:r>
+              <a:rPr sz="1500">
+                <a:solidFill>
+                  <a:srgbClr val="22282E"/>
+                </a:solidFill>
+              </a:rPr>
+              <a:t>•  Detección en Windows. En una VM Windows propia, revisa cómo el propio acto de limpiar el log deja rastro:</a:t>
+            </a:r>
+          </a:p>
+          <a:p>
+            <a:pPr>
+              <a:spcAft>
+                <a:spcPts val="600"/>
+              </a:spcAft>
+            </a:pPr>
+            <a:r>
+              <a:rPr sz="1500">
+                <a:solidFill>
+                  <a:srgbClr val="22282E"/>
+                </a:solidFill>
+              </a:rPr>
+              <a:t>•  Timestomping — detección. Analiza el $MFT de un archivo cuyo timestamp fue modificado y observa la divergencia $SI vs $FN. Documenta la firma.</a:t>
+            </a:r>
+          </a:p>
+          <a:p>
+            <a:pPr>
+              <a:spcAft>
+                <a:spcPts val="600"/>
+              </a:spcAft>
+            </a:pPr>
+            <a:r>
+              <a:rPr sz="1500">
+                <a:solidFill>
+                  <a:srgbClr val="22282E"/>
+                </a:solidFill>
+              </a:rPr>
+              <a:t>•  Redactar recomendaciones. Egress de logs, almacenamiento inmutable, alertas sobre Event ID 1102 y sobre gaps de logging.</a:t>
             </a:r>
           </a:p>
         </p:txBody>
